--- a/Claude_Harness_Engine_Design.pptx
+++ b/Claude_Harness_Engine_Design.pptx
@@ -3277,7 +3277,7 @@
                 </a:solidFill>
                 <a:latin typeface="Calibri"/>
               </a:rPr>
-              <a:t>Claude Harness Engine v1.1.1</a:t>
+              <a:t>Claude Harness Engine v1.1.5</a:t>
             </a:r>
           </a:p>
         </p:txBody>
@@ -3402,7 +3402,7 @@
                 </a:solidFill>
                 <a:latin typeface="Calibri"/>
               </a:rPr>
-              <a:t>21 SKILLS</a:t>
+              <a:t>23 SKILLS</a:t>
             </a:r>
           </a:p>
         </p:txBody>
@@ -4945,7 +4945,7 @@
                 </a:solidFill>
                 <a:latin typeface="Calibri"/>
               </a:rPr>
-              <a:t>Claude Harness Engine v1.1.1   ·   Autonomous SDLC for Agentic Software</a:t>
+              <a:t>Claude Harness Engine v1.1.5   ·   Autonomous SDLC for Agentic Software</a:t>
             </a:r>
           </a:p>
         </p:txBody>
@@ -6632,7 +6632,7 @@
                 </a:solidFill>
                 <a:latin typeface="Calibri"/>
               </a:rPr>
-              <a:t>Claude Harness Engine v1.1.1   ·   Autonomous SDLC for Agentic Software</a:t>
+              <a:t>Claude Harness Engine v1.1.5   ·   Autonomous SDLC for Agentic Software</a:t>
             </a:r>
           </a:p>
         </p:txBody>
@@ -8774,7 +8774,7 @@
                 </a:solidFill>
                 <a:latin typeface="Calibri"/>
               </a:rPr>
-              <a:t>Claude Harness Engine v1.1.1   ·   Autonomous SDLC for Agentic Software</a:t>
+              <a:t>Claude Harness Engine v1.1.5   ·   Autonomous SDLC for Agentic Software</a:t>
             </a:r>
           </a:p>
         </p:txBody>
@@ -9840,7 +9840,7 @@
                 </a:solidFill>
                 <a:latin typeface="Calibri"/>
               </a:rPr>
-              <a:t>Claude Harness Engine v1.1.1   ·   Autonomous SDLC for Agentic Software</a:t>
+              <a:t>Claude Harness Engine v1.1.5   ·   Autonomous SDLC for Agentic Software</a:t>
             </a:r>
           </a:p>
         </p:txBody>
@@ -10050,7 +10050,7 @@
                 </a:solidFill>
                 <a:latin typeface="Calibri"/>
               </a:rPr>
-              <a:t>Phase 0 (brownfield) is new. /build orchestrates phases 1-8; /auto handles phase 5-7 autonomously.</a:t>
+              <a:t>Phase 0 (brownfield) builds a deterministic AST + dep graph via /code-map and ranks seams via /seam-finder before any planning. /build orchestrates phases 1-8; /auto handles phase 5-7 autonomously.</a:t>
             </a:r>
           </a:p>
         </p:txBody>
@@ -12225,7 +12225,7 @@
                 </a:solidFill>
                 <a:latin typeface="Calibri"/>
               </a:rPr>
-              <a:t>Claude Harness Engine v1.1.1   ·   Autonomous SDLC for Agentic Software</a:t>
+              <a:t>Claude Harness Engine v1.1.5   ·   Autonomous SDLC for Agentic Software</a:t>
             </a:r>
           </a:p>
         </p:txBody>
@@ -12435,7 +12435,7 @@
                 </a:solidFill>
                 <a:latin typeface="Calibri"/>
               </a:rPr>
-              <a:t>Two new lanes added in v1.1.1 to handle reality: existing code and tiny low-risk edits</a:t>
+              <a:t>Two new lanes added in v1.1.5 to handle reality: existing code and tiny low-risk edits</a:t>
             </a:r>
           </a:p>
         </p:txBody>
@@ -12676,6 +12676,70 @@
                 </a:solidFill>
                 <a:latin typeface="Calibri"/>
               </a:rPr>
+              <a:t>▸ code-graph.json  AST + import + call graph (6 langs)</a:t>
+            </a:r>
+          </a:p>
+          <a:p>
+            <a:pPr>
+              <a:spcAft>
+                <a:spcPts val="200"/>
+              </a:spcAft>
+            </a:pPr>
+            <a:r>
+              <a:rPr sz="900" b="0">
+                <a:solidFill>
+                  <a:srgbClr val="CBD5E1"/>
+                </a:solidFill>
+                <a:latin typeface="Calibri"/>
+              </a:rPr>
+              <a:t>▸ dependency-graph.md  Mermaid render, top-N hubs</a:t>
+            </a:r>
+          </a:p>
+          <a:p>
+            <a:pPr>
+              <a:spcAft>
+                <a:spcPts val="200"/>
+              </a:spcAft>
+            </a:pPr>
+            <a:r>
+              <a:rPr sz="900" b="0">
+                <a:solidFill>
+                  <a:srgbClr val="CBD5E1"/>
+                </a:solidFill>
+                <a:latin typeface="Calibri"/>
+              </a:rPr>
+              <a:t>▸ coupling-report.md  fan-in/out, cycles, unstable hubs</a:t>
+            </a:r>
+          </a:p>
+          <a:p>
+            <a:pPr>
+              <a:spcAft>
+                <a:spcPts val="200"/>
+              </a:spcAft>
+            </a:pPr>
+            <a:r>
+              <a:rPr sz="900" b="0">
+                <a:solidFill>
+                  <a:srgbClr val="CBD5E1"/>
+                </a:solidFill>
+                <a:latin typeface="Calibri"/>
+              </a:rPr>
+              <a:t>▸ seams-*.md  ranked cut-points (Fowler scoring)</a:t>
+            </a:r>
+          </a:p>
+          <a:p>
+            <a:pPr>
+              <a:spcAft>
+                <a:spcPts val="200"/>
+              </a:spcAft>
+            </a:pPr>
+            <a:r>
+              <a:rPr sz="900" b="0">
+                <a:solidFill>
+                  <a:srgbClr val="CBD5E1"/>
+                </a:solidFill>
+                <a:latin typeface="Calibri"/>
+              </a:rPr>
               <a:t>▸ architecture-map.md  modules, layers, data flow</a:t>
             </a:r>
           </a:p>
@@ -13080,7 +13144,7 @@
                 </a:solidFill>
                 <a:latin typeface="Calibri"/>
               </a:rPr>
-              <a:t>Claude Harness Engine v1.1.1   ·   Autonomous SDLC for Agentic Software</a:t>
+              <a:t>Claude Harness Engine v1.1.5   ·   Autonomous SDLC for Agentic Software</a:t>
             </a:r>
           </a:p>
         </p:txBody>
@@ -14716,7 +14780,7 @@
                 </a:solidFill>
                 <a:latin typeface="Calibri"/>
               </a:rPr>
-              <a:t>Claude Harness Engine v1.1.1   ·   Autonomous SDLC for Agentic Software</a:t>
+              <a:t>Claude Harness Engine v1.1.5   ·   Autonomous SDLC for Agentic Software</a:t>
             </a:r>
           </a:p>
         </p:txBody>
@@ -16571,7 +16635,7 @@
                 </a:solidFill>
                 <a:latin typeface="Calibri"/>
               </a:rPr>
-              <a:t>Claude Harness Engine v1.1.1   ·   Autonomous SDLC for Agentic Software</a:t>
+              <a:t>Claude Harness Engine v1.1.5   ·   Autonomous SDLC for Agentic Software</a:t>
             </a:r>
           </a:p>
         </p:txBody>
@@ -17336,7 +17400,7 @@
                 </a:solidFill>
                 <a:latin typeface="Calibri"/>
               </a:rPr>
-              <a:t>Claude Harness Engine v1.1.1   ·   Autonomous SDLC for Agentic Software</a:t>
+              <a:t>Claude Harness Engine v1.1.5   ·   Autonomous SDLC for Agentic Software</a:t>
             </a:r>
           </a:p>
         </p:txBody>
@@ -18016,7 +18080,7 @@
                 </a:solidFill>
                 <a:latin typeface="Calibri"/>
               </a:rPr>
-              <a:t>Claude Harness Engine v1.1.1   ·   Autonomous SDLC for Agentic Software</a:t>
+              <a:t>Claude Harness Engine v1.1.5   ·   Autonomous SDLC for Agentic Software</a:t>
             </a:r>
           </a:p>
         </p:txBody>
@@ -18191,7 +18255,7 @@
                 </a:solidFill>
                 <a:latin typeface="Calibri"/>
               </a:rPr>
-              <a:t>What's New in v1.1.1</a:t>
+              <a:t>What's New in v1.1.5</a:t>
             </a:r>
           </a:p>
         </p:txBody>
@@ -18346,7 +18410,7 @@
                 </a:solidFill>
                 <a:latin typeface="Calibri"/>
               </a:rPr>
-              <a:t>/brownfield maps existing codebases (codebase-map, architecture, tests, risks, change strategy) before any planning or refactor.</a:t>
+              <a:t>/brownfield + /code-map + /seam-finder. Deterministic AST + dependency graph + Fowler seam scoring (observable + funnel + R/W asymmetry) ground every brownfield decision in graph evidence, not vibes.</a:t>
             </a:r>
           </a:p>
         </p:txBody>
@@ -19016,7 +19080,7 @@
                 </a:solidFill>
                 <a:latin typeface="Calibri"/>
               </a:rPr>
-              <a:t>Claude Harness Engine v1.1.1   ·   Autonomous SDLC for Agentic Software</a:t>
+              <a:t>Claude Harness Engine v1.1.5   ·   Autonomous SDLC for Agentic Software</a:t>
             </a:r>
           </a:p>
         </p:txBody>
@@ -19824,7 +19888,7 @@
                 </a:solidFill>
                 <a:latin typeface="Calibri"/>
               </a:rPr>
-              <a:t>Claude Harness Engine v1.1.1   ·   Autonomous SDLC for Agentic Software</a:t>
+              <a:t>Claude Harness Engine v1.1.5   ·   Autonomous SDLC for Agentic Software</a:t>
             </a:r>
           </a:p>
         </p:txBody>
@@ -21219,7 +21283,7 @@
                 </a:solidFill>
                 <a:latin typeface="Calibri"/>
               </a:rPr>
-              <a:t>Claude Harness Engine v1.1.1   ·   Autonomous SDLC for Agentic Software</a:t>
+              <a:t>Claude Harness Engine v1.1.5   ·   Autonomous SDLC for Agentic Software</a:t>
             </a:r>
           </a:p>
         </p:txBody>
@@ -22663,7 +22727,7 @@
                 </a:solidFill>
                 <a:latin typeface="Calibri"/>
               </a:rPr>
-              <a:t>Claude Harness Engine v1.1.1   ·   Autonomous SDLC for Agentic Software</a:t>
+              <a:t>Claude Harness Engine v1.1.5   ·   Autonomous SDLC for Agentic Software</a:t>
             </a:r>
           </a:p>
         </p:txBody>
@@ -23776,7 +23840,7 @@
                 </a:solidFill>
                 <a:latin typeface="Calibri"/>
               </a:rPr>
-              <a:t>Claude Harness Engine v1.1.1   ·   Autonomous SDLC for Agentic Software</a:t>
+              <a:t>Claude Harness Engine v1.1.5   ·   Autonomous SDLC for Agentic Software</a:t>
             </a:r>
           </a:p>
         </p:txBody>
@@ -24881,7 +24945,7 @@
                 </a:solidFill>
                 <a:latin typeface="Calibri"/>
               </a:rPr>
-              <a:t>Claude Harness Engine v1.1.1   ·   Autonomous SDLC for Agentic Software</a:t>
+              <a:t>Claude Harness Engine v1.1.5   ·   Autonomous SDLC for Agentic Software</a:t>
             </a:r>
           </a:p>
         </p:txBody>
@@ -26089,7 +26153,7 @@
                 </a:solidFill>
                 <a:latin typeface="Calibri"/>
               </a:rPr>
-              <a:t>Claude Harness Engine v1.1.1   ·   Autonomous SDLC for Agentic Software</a:t>
+              <a:t>Claude Harness Engine v1.1.5   ·   Autonomous SDLC for Agentic Software</a:t>
             </a:r>
           </a:p>
         </p:txBody>
@@ -26896,7 +26960,7 @@
                 </a:solidFill>
                 <a:latin typeface="Calibri"/>
               </a:rPr>
-              <a:t>Claude Harness Engine v1.1.1   ·   Autonomous SDLC for Agentic Software</a:t>
+              <a:t>Claude Harness Engine v1.1.5   ·   Autonomous SDLC for Agentic Software</a:t>
             </a:r>
           </a:p>
         </p:txBody>
@@ -28303,7 +28367,7 @@
                 </a:solidFill>
                 <a:latin typeface="Calibri"/>
               </a:rPr>
-              <a:t>Claude Harness Engine v1.1.1   ·   Autonomous SDLC for Agentic Software</a:t>
+              <a:t>Claude Harness Engine v1.1.5   ·   Autonomous SDLC for Agentic Software</a:t>
             </a:r>
           </a:p>
         </p:txBody>
@@ -29241,7 +29305,7 @@
                 </a:solidFill>
                 <a:latin typeface="Calibri"/>
               </a:rPr>
-              <a:t>Claude Harness Engine v1.1.1   ·   Autonomous SDLC for Agentic Software</a:t>
+              <a:t>Claude Harness Engine v1.1.5   ·   Autonomous SDLC for Agentic Software</a:t>
             </a:r>
           </a:p>
         </p:txBody>
@@ -29935,7 +29999,7 @@
                 </a:solidFill>
                 <a:latin typeface="Calibri"/>
               </a:rPr>
-              <a:t>Claude Harness Engine v1.1.1   ·   Autonomous SDLC for Agentic Software</a:t>
+              <a:t>Claude Harness Engine v1.1.5   ·   Autonomous SDLC for Agentic Software</a:t>
             </a:r>
           </a:p>
         </p:txBody>
@@ -30695,7 +30759,7 @@
                 </a:solidFill>
                 <a:latin typeface="Calibri"/>
               </a:rPr>
-              <a:t>Claude Harness Engine v1.1.1   ·   Autonomous SDLC for Agentic Software</a:t>
+              <a:t>Claude Harness Engine v1.1.5   ·   Autonomous SDLC for Agentic Software</a:t>
             </a:r>
           </a:p>
         </p:txBody>
@@ -31611,7 +31675,7 @@
                 </a:solidFill>
                 <a:latin typeface="Calibri"/>
               </a:rPr>
-              <a:t>Brownfield + Vibe</a:t>
+              <a:t>Graph-grounded Brownfield + Vibe</a:t>
             </a:r>
           </a:p>
         </p:txBody>
@@ -31646,7 +31710,7 @@
                 </a:solidFill>
                 <a:latin typeface="Calibri"/>
               </a:rPr>
-              <a:t>Two new lanes in v1.1.1 make the harness adaptable to real codebases and tiny safe edits, without bypassing the ratchet.</a:t>
+              <a:t>Brownfield discovery now produces a deterministic AST + dependency graph + Fowler seam ranking. Tiny safe edits use /vibe. Both lanes preserve the ratchet.</a:t>
             </a:r>
           </a:p>
         </p:txBody>
@@ -31875,7 +31939,7 @@
                 </a:solidFill>
                 <a:latin typeface="Calibri"/>
               </a:rPr>
-              <a:t>Claude Harness Engine v1.1.1  —  Autonomous SDLC for the Age of Agents</a:t>
+              <a:t>Claude Harness Engine v1.1.5  —  Autonomous SDLC for the Age of Agents</a:t>
             </a:r>
           </a:p>
         </p:txBody>
@@ -31910,7 +31974,7 @@
                 </a:solidFill>
                 <a:latin typeface="Calibri"/>
               </a:rPr>
-              <a:t>Claude Harness Engine v1.1.1   ·   Autonomous SDLC for Agentic Software</a:t>
+              <a:t>Claude Harness Engine v1.1.5   ·   Autonomous SDLC for Agentic Software</a:t>
             </a:r>
           </a:p>
         </p:txBody>
@@ -32871,7 +32935,7 @@
                 </a:solidFill>
                 <a:latin typeface="Calibri"/>
               </a:rPr>
-              <a:t>Claude Harness Engine v1.1.1   ·   Autonomous SDLC for Agentic Software</a:t>
+              <a:t>Claude Harness Engine v1.1.5   ·   Autonomous SDLC for Agentic Software</a:t>
             </a:r>
           </a:p>
         </p:txBody>
@@ -33251,7 +33315,7 @@
                 </a:solidFill>
                 <a:latin typeface="Consolas"/>
               </a:rPr>
-              <a:t>├─ skills/  (21)  </a:t>
+              <a:t>├─ skills/  (23)  </a:t>
             </a:r>
             <a:r>
               <a:rPr sz="1000">
@@ -33708,7 +33772,7 @@
                 </a:solidFill>
                 <a:latin typeface="Calibri"/>
               </a:rPr>
-              <a:t>Claude Harness Engine v1.1.1   ·   Autonomous SDLC for Agentic Software</a:t>
+              <a:t>Claude Harness Engine v1.1.5   ·   Autonomous SDLC for Agentic Software</a:t>
             </a:r>
           </a:p>
         </p:txBody>
@@ -34933,7 +34997,7 @@
                 </a:solidFill>
                 <a:latin typeface="Calibri"/>
               </a:rPr>
-              <a:t>Claude Harness Engine v1.1.1   ·   Autonomous SDLC for Agentic Software</a:t>
+              <a:t>Claude Harness Engine v1.1.5   ·   Autonomous SDLC for Agentic Software</a:t>
             </a:r>
           </a:p>
         </p:txBody>
@@ -35728,7 +35792,7 @@
                 </a:solidFill>
                 <a:latin typeface="Calibri"/>
               </a:rPr>
-              <a:t>Claude Harness Engine v1.1.1   ·   Autonomous SDLC for Agentic Software</a:t>
+              <a:t>Claude Harness Engine v1.1.5   ·   Autonomous SDLC for Agentic Software</a:t>
             </a:r>
           </a:p>
         </p:txBody>
@@ -38720,7 +38784,7 @@
                 </a:solidFill>
                 <a:latin typeface="Calibri"/>
               </a:rPr>
-              <a:t>Claude Harness Engine v1.1.1   ·   Autonomous SDLC for Agentic Software</a:t>
+              <a:t>Claude Harness Engine v1.1.5   ·   Autonomous SDLC for Agentic Software</a:t>
             </a:r>
           </a:p>
         </p:txBody>
@@ -38895,7 +38959,7 @@
                 </a:solidFill>
                 <a:latin typeface="Calibri"/>
               </a:rPr>
-              <a:t>The 21 Skills, Grouped by Purpose</a:t>
+              <a:t>The 23 Skills, Grouped by Purpose</a:t>
             </a:r>
           </a:p>
         </p:txBody>
@@ -39349,6 +39413,38 @@
               <a:t>▸ /clarify</a:t>
             </a:r>
           </a:p>
+          <a:p>
+            <a:pPr>
+              <a:spcAft>
+                <a:spcPts val="200"/>
+              </a:spcAft>
+            </a:pPr>
+            <a:r>
+              <a:rPr sz="1000" b="0">
+                <a:solidFill>
+                  <a:srgbClr val="F8FAFC"/>
+                </a:solidFill>
+                <a:latin typeface="Consolas"/>
+              </a:rPr>
+              <a:t>▸ /code-map</a:t>
+            </a:r>
+          </a:p>
+          <a:p>
+            <a:pPr>
+              <a:spcAft>
+                <a:spcPts val="200"/>
+              </a:spcAft>
+            </a:pPr>
+            <a:r>
+              <a:rPr sz="1000" b="0">
+                <a:solidFill>
+                  <a:srgbClr val="F8FAFC"/>
+                </a:solidFill>
+                <a:latin typeface="Consolas"/>
+              </a:rPr>
+              <a:t>▸ /seam-finder</a:t>
+            </a:r>
+          </a:p>
         </p:txBody>
       </p:sp>
       <p:sp>
@@ -39752,7 +39848,7 @@
                 </a:solidFill>
                 <a:latin typeface="Calibri"/>
               </a:rPr>
-              <a:t>Claude Harness Engine v1.1.1   ·   Autonomous SDLC for Agentic Software</a:t>
+              <a:t>Claude Harness Engine v1.1.5   ·   Autonomous SDLC for Agentic Software</a:t>
             </a:r>
           </a:p>
         </p:txBody>
